--- a/Шеметов_932305_Курсовая_31.05.2025.pptx
+++ b/Шеметов_932305_Курсовая_31.05.2025.pptx
@@ -1060,7 +1060,7 @@
           <a:p>
             <a:fld id="{5E3CDDBE-6B1E-4E1A-9E54-303295BE6305}" type="datetimeFigureOut">
               <a:rPr lang="ru-RU" smtClean="0"/>
-              <a:t>31.05.2026</a:t>
+              <a:t>23.06.2026</a:t>
             </a:fld>
             <a:endParaRPr lang="ru-RU"/>
           </a:p>
@@ -1478,7 +1478,7 @@
           <a:p>
             <a:fld id="{33F66E1D-004E-4CFA-A656-57BDDD0CA867}" type="datetime1">
               <a:rPr lang="en-US" smtClean="0"/>
-              <a:t>5/31/2026</a:t>
+              <a:t>6/23/2026</a:t>
             </a:fld>
             <a:endParaRPr lang="en-US"/>
           </a:p>
@@ -1661,7 +1661,7 @@
           <a:p>
             <a:fld id="{F900DCBC-A005-4FF0-B60D-BCB8B63134DD}" type="datetime1">
               <a:rPr lang="en-US" smtClean="0"/>
-              <a:t>5/31/2026</a:t>
+              <a:t>6/23/2026</a:t>
             </a:fld>
             <a:endParaRPr lang="en-US"/>
           </a:p>
@@ -1881,7 +1881,7 @@
           <a:p>
             <a:fld id="{8200F3EE-A326-4508-990F-2E2E62D43F35}" type="datetime1">
               <a:rPr lang="en-US" smtClean="0"/>
-              <a:t>5/31/2026</a:t>
+              <a:t>6/23/2026</a:t>
             </a:fld>
             <a:endParaRPr lang="en-US"/>
           </a:p>
@@ -2035,7 +2035,7 @@
           <a:p>
             <a:fld id="{02C19796-C9BC-4CE0-9D1E-EE1D71E2561E}" type="datetime1">
               <a:rPr lang="en-US" smtClean="0"/>
-              <a:t>5/31/2026</a:t>
+              <a:t>6/23/2026</a:t>
             </a:fld>
             <a:endParaRPr lang="en-US"/>
           </a:p>
@@ -2212,7 +2212,7 @@
           <a:p>
             <a:fld id="{DC4DAC54-F31A-40FE-9F01-FAFF330AC930}" type="datetime1">
               <a:rPr lang="en-US" smtClean="0"/>
-              <a:t>5/31/2026</a:t>
+              <a:t>6/23/2026</a:t>
             </a:fld>
             <a:endParaRPr lang="en-US"/>
           </a:p>
@@ -2443,7 +2443,7 @@
           <a:p>
             <a:fld id="{1379520E-5326-45AD-A9C1-B33CDC78DB78}" type="datetime1">
               <a:rPr lang="en-US" smtClean="0"/>
-              <a:t>5/31/2026</a:t>
+              <a:t>6/23/2026</a:t>
             </a:fld>
             <a:endParaRPr lang="en-US"/>
           </a:p>
